--- a/courses/learn_clustering/module02-05-kernighan-lin/slides.pptx
+++ b/courses/learn_clustering/module02-05-kernighan-lin/slides.pptx
@@ -515,12 +515,6 @@
               <a:t>Kernighan–Lin improves an existing bipartition by swapping pairs across the cut. You’ll watch a full pass—gains, locking, a swap sequence, and rollback to the best prefix. On the starter seed that cuts both heavy edges, KL drives the cut from twelve down to three.</a:t>
             </a:r>
           </a:p>
-          <a:p/>
-          <a:p>
-            <a:r>
-              <a:t>&lt;!-- algorithm-walkthrough --&gt;</a:t>
-            </a:r>
-          </a:p>
         </p:txBody>
       </p:sp>
       <p:sp>
@@ -939,12 +933,6 @@
           <a:p>
             <a:r>
               <a:t>Pass one reports no improvement. KL stops at a local optimum for swap moves from this seed. Quality still depends on where you started.</a:t>
-            </a:r>
-          </a:p>
-          <a:p/>
-          <a:p>
-            <a:r>
-              <a:t>&lt;!-- /algorithm-walkthrough --&gt;</a:t>
             </a:r>
           </a:p>
         </p:txBody>
@@ -5837,7 +5825,7 @@
                 <a:spcPts val="2200"/>
               </a:lnSpc>
               <a:spcAft>
-                <a:spcPts val="600"/>
+                <a:spcPts val="400"/>
               </a:spcAft>
             </a:pPr>
             <a:r>
@@ -5856,7 +5844,7 @@
                 <a:spcPts val="2200"/>
               </a:lnSpc>
               <a:spcAft>
-                <a:spcPts val="600"/>
+                <a:spcPts val="400"/>
               </a:spcAft>
             </a:pPr>
             <a:r>
@@ -5875,7 +5863,7 @@
                 <a:spcPts val="2200"/>
               </a:lnSpc>
               <a:spcAft>
-                <a:spcPts val="600"/>
+                <a:spcPts val="400"/>
               </a:spcAft>
             </a:pPr>
             <a:r>
@@ -5894,7 +5882,7 @@
                 <a:spcPts val="2200"/>
               </a:lnSpc>
               <a:spcAft>
-                <a:spcPts val="600"/>
+                <a:spcPts val="400"/>
               </a:spcAft>
             </a:pPr>
             <a:r>
@@ -5913,7 +5901,7 @@
                 <a:spcPts val="2200"/>
               </a:lnSpc>
               <a:spcAft>
-                <a:spcPts val="600"/>
+                <a:spcPts val="400"/>
               </a:spcAft>
             </a:pPr>
             <a:r>
@@ -5932,7 +5920,7 @@
                 <a:spcPts val="2200"/>
               </a:lnSpc>
               <a:spcAft>
-                <a:spcPts val="600"/>
+                <a:spcPts val="400"/>
               </a:spcAft>
             </a:pPr>
             <a:r>
@@ -5951,7 +5939,7 @@
                 <a:spcPts val="2200"/>
               </a:lnSpc>
               <a:spcAft>
-                <a:spcPts val="600"/>
+                <a:spcPts val="400"/>
               </a:spcAft>
             </a:pPr>
             <a:r>
@@ -5970,7 +5958,7 @@
                 <a:spcPts val="2200"/>
               </a:lnSpc>
               <a:spcAft>
-                <a:spcPts val="600"/>
+                <a:spcPts val="400"/>
               </a:spcAft>
             </a:pPr>
             <a:r>
@@ -5989,7 +5977,7 @@
                 <a:spcPts val="2200"/>
               </a:lnSpc>
               <a:spcAft>
-                <a:spcPts val="600"/>
+                <a:spcPts val="400"/>
               </a:spcAft>
             </a:pPr>
             <a:r>
@@ -5999,7 +5987,7 @@
                 </a:solidFill>
                 <a:latin typeface="Consolas"/>
               </a:rPr>
-              <a:t/>
+              <a:t>python ../common/solvers.py examples/tiny_graph.json --mode kl</a:t>
             </a:r>
           </a:p>
           <a:p>
@@ -6008,7 +5996,7 @@
                 <a:spcPts val="2200"/>
               </a:lnSpc>
               <a:spcAft>
-                <a:spcPts val="600"/>
+                <a:spcPts val="400"/>
               </a:spcAft>
             </a:pPr>
             <a:r>
@@ -6018,26 +6006,7 @@
                 </a:solidFill>
                 <a:latin typeface="Consolas"/>
               </a:rPr>
-              <a:t>python ../common/solvers.py examples/tiny_graph.json --mode kl --seed</a:t>
-            </a:r>
-          </a:p>
-          <a:p>
-            <a:pPr>
-              <a:lnSpc>
-                <a:spcPts val="2200"/>
-              </a:lnSpc>
-              <a:spcAft>
-                <a:spcPts val="600"/>
-              </a:spcAft>
-            </a:pPr>
-            <a:r>
-              <a:rPr sz="2000" b="0">
-                <a:solidFill>
-                  <a:srgbClr val="333333"/>
-                </a:solidFill>
-                <a:latin typeface="Consolas"/>
-              </a:rPr>
-              <a:t>examples/seed_partition.json</a:t>
+              <a:t>--seed examples/seed_partition.json</a:t>
             </a:r>
           </a:p>
         </p:txBody>
